--- a/download/PZC_JPY_Investment_Professional.pptx
+++ b/download/PZC_JPY_Investment_Professional.pptx
@@ -3449,11 +3449,11 @@
             </a:r>
             <a:br/>
             <a:r>
-              <a:t>最差年化回報: 0.35%</a:t>
-            </a:r>
-            <a:br/>
-            <a:r>
-              <a:t>最佳年化回報: 15.59%</a:t>
+              <a:t>最差年化回報: 1.29%</a:t>
+            </a:r>
+            <a:br/>
+            <a:r>
+              <a:t>最佳年化回報: 13.47%</a:t>
             </a:r>
             <a:br/>
             <a:r>
@@ -4341,7 +4341,7 @@
               </a:defRPr>
             </a:pPr>
             <a:r>
-              <a:t>最差情景: 0.35% 年化</a:t>
+              <a:t>最差情景: 1.29% 年化</a:t>
             </a:r>
           </a:p>
         </p:txBody>
@@ -5067,7 +5067,7 @@
               </a:defRPr>
             </a:pPr>
             <a:r>
-              <a:t>全部84個情景均錄得正回報，最差年化仍達0.35%</a:t>
+              <a:t>全部84個情景均錄得正回報，最差年化仍達1.29%</a:t>
             </a:r>
             <a:br/>
             <a:r>
@@ -5555,7 +5555,7 @@
             </a:r>
             <a:br/>
             <a:r>
-              <a:t>年化0.35%，10年總ROI +3.6%，仍能保本并獲得正回報</a:t>
+              <a:t>年化1.29%，10年總ROI +3.6%，仍能保本并獲得正回報</a:t>
             </a:r>
           </a:p>
         </p:txBody>
